--- a/slides/pySROS_Getting_Started.pptx
+++ b/slides/pySROS_Getting_Started.pptx
@@ -4214,7 +4214,7 @@
                 <a:ea typeface="Consolas" pitchFamily="34" charset="-122"/>
                 <a:cs typeface="Consolas" pitchFamily="34" charset="-120"/>
               </a:rPr>
-              <a:t>Your prompt changes to: </a:t>
+              <a:t xml:space="preserve">Your prompt changes to: </a:t>
             </a:r>
             <a:pPr indent="0" marL="0">
               <a:buNone/>
@@ -4242,7 +4242,7 @@
                 <a:ea typeface="Consolas" pitchFamily="34" charset="-122"/>
                 <a:cs typeface="Consolas" pitchFamily="34" charset="-120"/>
               </a:rPr>
-              <a:t>  ← You're now inside the sandbox!</a:t>
+              <a:t xml:space="preserve">  ← You're now inside the sandbox!</a:t>
             </a:r>
             <a:endParaRPr lang="en-US" sz="1300" dirty="0"/>
           </a:p>
@@ -4878,7 +4878,7 @@
                 <a:ea typeface="Consolas" pitchFamily="34" charset="-122"/>
                 <a:cs typeface="Consolas" pitchFamily="34" charset="-120"/>
               </a:rPr>
-              <a:t>&gt;&gt;&gt; </a:t>
+              <a:t xml:space="preserve">&gt;&gt;&gt; </a:t>
             </a:r>
             <a:endParaRPr lang="en-US" sz="1400" dirty="0"/>
           </a:p>
@@ -5191,7 +5191,7 @@
                 <a:ea typeface="Consolas" pitchFamily="34" charset="-122"/>
                 <a:cs typeface="Consolas" pitchFamily="34" charset="-120"/>
               </a:rPr>
-              <a:t>&gt;&gt;&gt; </a:t>
+              <a:t xml:space="preserve">&gt;&gt;&gt; </a:t>
             </a:r>
             <a:pPr indent="0" marL="0">
               <a:buNone/>
@@ -5244,7 +5244,7 @@
                 <a:ea typeface="Consolas" pitchFamily="34" charset="-122"/>
                 <a:cs typeface="Consolas" pitchFamily="34" charset="-120"/>
               </a:rPr>
-              <a:t>&gt;&gt;&gt; </a:t>
+              <a:t xml:space="preserve">&gt;&gt;&gt; </a:t>
             </a:r>
             <a:pPr indent="0" marL="0">
               <a:buNone/>
@@ -5297,7 +5297,7 @@
                 <a:ea typeface="Consolas" pitchFamily="34" charset="-122"/>
                 <a:cs typeface="Consolas" pitchFamily="34" charset="-120"/>
               </a:rPr>
-              <a:t>...       </a:t>
+              <a:t xml:space="preserve">...       </a:t>
             </a:r>
             <a:pPr indent="0" marL="0">
               <a:buNone/>
@@ -5350,7 +5350,7 @@
                 <a:ea typeface="Consolas" pitchFamily="34" charset="-122"/>
                 <a:cs typeface="Consolas" pitchFamily="34" charset="-120"/>
               </a:rPr>
-              <a:t>...       </a:t>
+              <a:t xml:space="preserve">...       </a:t>
             </a:r>
             <a:pPr indent="0" marL="0">
               <a:buNone/>
@@ -5403,7 +5403,7 @@
                 <a:ea typeface="Consolas" pitchFamily="34" charset="-122"/>
                 <a:cs typeface="Consolas" pitchFamily="34" charset="-120"/>
               </a:rPr>
-              <a:t>&gt;&gt;&gt; </a:t>
+              <a:t xml:space="preserve">&gt;&gt;&gt; </a:t>
             </a:r>
             <a:pPr indent="0" marL="0">
               <a:buNone/>
@@ -5495,7 +5495,7 @@
                 <a:ea typeface="Consolas" pitchFamily="34" charset="-122"/>
                 <a:cs typeface="Consolas" pitchFamily="34" charset="-120"/>
               </a:rPr>
-              <a:t>&gt;&gt;&gt; </a:t>
+              <a:t xml:space="preserve">&gt;&gt;&gt; </a:t>
             </a:r>
             <a:pPr indent="0" marL="0">
               <a:buNone/>
@@ -7249,7 +7249,7 @@
                 <a:ea typeface="Calibri" pitchFamily="34" charset="-122"/>
                 <a:cs typeface="Calibri" pitchFamily="34" charset="-120"/>
               </a:rPr>
-              <a:t>pySROS Documentation: https://network.developer.nokia.com/sr/learn/pysros</a:t>
+              <a:t>pySROS Documentation: https://network.developer.nokia.com/static/sr/learn/pysros/latest/</a:t>
             </a:r>
             <a:endParaRPr lang="en-US" sz="1100" dirty="0"/>
           </a:p>
